--- a/assets/images/Administration_System.pptx
+++ b/assets/images/Administration_System.pptx
@@ -5,11 +5,13 @@
     <p:sldMasterId id="2147483684" r:id="rId4"/>
   </p:sldMasterIdLst>
   <p:notesMasterIdLst>
-    <p:notesMasterId r:id="rId7"/>
+    <p:notesMasterId r:id="rId9"/>
   </p:notesMasterIdLst>
   <p:sldIdLst>
     <p:sldId id="256" r:id="rId5"/>
-    <p:sldId id="257" r:id="rId6"/>
+    <p:sldId id="258" r:id="rId6"/>
+    <p:sldId id="259" r:id="rId7"/>
+    <p:sldId id="260" r:id="rId8"/>
   </p:sldIdLst>
   <p:sldSz cx="21601113" cy="14400213"/>
   <p:notesSz cx="9144000" cy="6858000"/>
@@ -403,7 +405,7 @@
           <a:p>
             <a:fld id="{43466010-90F5-41E6-AAE8-7E580DBF8C7C}" type="datetimeFigureOut">
               <a:rPr lang="en-DK" smtClean="0"/>
-              <a:t>23/02/2026</a:t>
+              <a:t>25/02/2026</a:t>
             </a:fld>
             <a:endParaRPr lang="en-DK"/>
           </a:p>
@@ -759,94 +761,6 @@
 </p:notes>
 </file>
 
-<file path=ppt/notesSlides/notesSlide2.xml><?xml version="1.0" encoding="utf-8"?>
-<p:notes xmlns:a="http://schemas.openxmlformats.org/drawingml/2006/main" xmlns:r="http://schemas.openxmlformats.org/officeDocument/2006/relationships" xmlns:p="http://schemas.openxmlformats.org/presentationml/2006/main">
-  <p:cSld>
-    <p:spTree>
-      <p:nvGrpSpPr>
-        <p:cNvPr id="1" name=""/>
-        <p:cNvGrpSpPr/>
-        <p:nvPr/>
-      </p:nvGrpSpPr>
-      <p:grpSpPr>
-        <a:xfrm>
-          <a:off x="0" y="0"/>
-          <a:ext cx="0" cy="0"/>
-          <a:chOff x="0" y="0"/>
-          <a:chExt cx="0" cy="0"/>
-        </a:xfrm>
-      </p:grpSpPr>
-      <p:sp>
-        <p:nvSpPr>
-          <p:cNvPr id="2" name="Slide Image Placeholder 1"/>
-          <p:cNvSpPr>
-            <a:spLocks noGrp="1" noRot="1" noChangeAspect="1"/>
-          </p:cNvSpPr>
-          <p:nvPr>
-            <p:ph type="sldImg"/>
-          </p:nvPr>
-        </p:nvSpPr>
-        <p:spPr/>
-      </p:sp>
-      <p:sp>
-        <p:nvSpPr>
-          <p:cNvPr id="3" name="Notes Placeholder 2"/>
-          <p:cNvSpPr>
-            <a:spLocks noGrp="1"/>
-          </p:cNvSpPr>
-          <p:nvPr>
-            <p:ph type="body" idx="1"/>
-          </p:nvPr>
-        </p:nvSpPr>
-        <p:spPr/>
-        <p:txBody>
-          <a:bodyPr/>
-          <a:lstStyle/>
-          <a:p>
-            <a:r>
-              <a:rPr lang="en-GB" dirty="0"/>
-              <a:t>LabBench I/O</a:t>
-            </a:r>
-            <a:endParaRPr lang="en-DK" dirty="0"/>
-          </a:p>
-        </p:txBody>
-      </p:sp>
-      <p:sp>
-        <p:nvSpPr>
-          <p:cNvPr id="4" name="Slide Number Placeholder 3"/>
-          <p:cNvSpPr>
-            <a:spLocks noGrp="1"/>
-          </p:cNvSpPr>
-          <p:nvPr>
-            <p:ph type="sldNum" sz="quarter" idx="5"/>
-          </p:nvPr>
-        </p:nvSpPr>
-        <p:spPr/>
-        <p:txBody>
-          <a:bodyPr/>
-          <a:lstStyle/>
-          <a:p>
-            <a:fld id="{A20644BD-399A-490A-99CC-829CA96D1157}" type="slidenum">
-              <a:rPr lang="en-DK" smtClean="0"/>
-              <a:t>2</a:t>
-            </a:fld>
-            <a:endParaRPr lang="en-DK"/>
-          </a:p>
-        </p:txBody>
-      </p:sp>
-    </p:spTree>
-    <p:extLst>
-      <p:ext uri="{BB962C8B-B14F-4D97-AF65-F5344CB8AC3E}">
-        <p14:creationId xmlns:p14="http://schemas.microsoft.com/office/powerpoint/2010/main" val="99399054"/>
-      </p:ext>
-    </p:extLst>
-  </p:cSld>
-  <p:clrMapOvr>
-    <a:masterClrMapping/>
-  </p:clrMapOvr>
-</p:notes>
-</file>
-
 <file path=ppt/slideLayouts/slideLayout1.xml><?xml version="1.0" encoding="utf-8"?>
 <p:sldLayout xmlns:a="http://schemas.openxmlformats.org/drawingml/2006/main" xmlns:r="http://schemas.openxmlformats.org/officeDocument/2006/relationships" xmlns:p="http://schemas.openxmlformats.org/presentationml/2006/main" type="title" preserve="1">
   <p:cSld name="Title Slide">
@@ -978,7 +892,7 @@
           <a:p>
             <a:fld id="{F1465E3F-0B9F-47C9-9E08-5C827E095B3E}" type="datetimeFigureOut">
               <a:rPr lang="en-DK" smtClean="0"/>
-              <a:t>23/02/2026</a:t>
+              <a:t>25/02/2026</a:t>
             </a:fld>
             <a:endParaRPr lang="en-DK"/>
           </a:p>
@@ -1148,7 +1062,7 @@
           <a:p>
             <a:fld id="{F1465E3F-0B9F-47C9-9E08-5C827E095B3E}" type="datetimeFigureOut">
               <a:rPr lang="en-DK" smtClean="0"/>
-              <a:t>23/02/2026</a:t>
+              <a:t>25/02/2026</a:t>
             </a:fld>
             <a:endParaRPr lang="en-DK"/>
           </a:p>
@@ -1328,7 +1242,7 @@
           <a:p>
             <a:fld id="{F1465E3F-0B9F-47C9-9E08-5C827E095B3E}" type="datetimeFigureOut">
               <a:rPr lang="en-DK" smtClean="0"/>
-              <a:t>23/02/2026</a:t>
+              <a:t>25/02/2026</a:t>
             </a:fld>
             <a:endParaRPr lang="en-DK"/>
           </a:p>
@@ -1498,7 +1412,7 @@
           <a:p>
             <a:fld id="{F1465E3F-0B9F-47C9-9E08-5C827E095B3E}" type="datetimeFigureOut">
               <a:rPr lang="en-DK" smtClean="0"/>
-              <a:t>23/02/2026</a:t>
+              <a:t>25/02/2026</a:t>
             </a:fld>
             <a:endParaRPr lang="en-DK"/>
           </a:p>
@@ -1744,7 +1658,7 @@
           <a:p>
             <a:fld id="{F1465E3F-0B9F-47C9-9E08-5C827E095B3E}" type="datetimeFigureOut">
               <a:rPr lang="en-DK" smtClean="0"/>
-              <a:t>23/02/2026</a:t>
+              <a:t>25/02/2026</a:t>
             </a:fld>
             <a:endParaRPr lang="en-DK"/>
           </a:p>
@@ -1976,7 +1890,7 @@
           <a:p>
             <a:fld id="{F1465E3F-0B9F-47C9-9E08-5C827E095B3E}" type="datetimeFigureOut">
               <a:rPr lang="en-DK" smtClean="0"/>
-              <a:t>23/02/2026</a:t>
+              <a:t>25/02/2026</a:t>
             </a:fld>
             <a:endParaRPr lang="en-DK"/>
           </a:p>
@@ -2343,7 +2257,7 @@
           <a:p>
             <a:fld id="{F1465E3F-0B9F-47C9-9E08-5C827E095B3E}" type="datetimeFigureOut">
               <a:rPr lang="en-DK" smtClean="0"/>
-              <a:t>23/02/2026</a:t>
+              <a:t>25/02/2026</a:t>
             </a:fld>
             <a:endParaRPr lang="en-DK"/>
           </a:p>
@@ -2461,7 +2375,7 @@
           <a:p>
             <a:fld id="{F1465E3F-0B9F-47C9-9E08-5C827E095B3E}" type="datetimeFigureOut">
               <a:rPr lang="en-DK" smtClean="0"/>
-              <a:t>23/02/2026</a:t>
+              <a:t>25/02/2026</a:t>
             </a:fld>
             <a:endParaRPr lang="en-DK"/>
           </a:p>
@@ -2556,7 +2470,7 @@
           <a:p>
             <a:fld id="{F1465E3F-0B9F-47C9-9E08-5C827E095B3E}" type="datetimeFigureOut">
               <a:rPr lang="en-DK" smtClean="0"/>
-              <a:t>23/02/2026</a:t>
+              <a:t>25/02/2026</a:t>
             </a:fld>
             <a:endParaRPr lang="en-DK"/>
           </a:p>
@@ -2833,7 +2747,7 @@
           <a:p>
             <a:fld id="{F1465E3F-0B9F-47C9-9E08-5C827E095B3E}" type="datetimeFigureOut">
               <a:rPr lang="en-DK" smtClean="0"/>
-              <a:t>23/02/2026</a:t>
+              <a:t>25/02/2026</a:t>
             </a:fld>
             <a:endParaRPr lang="en-DK"/>
           </a:p>
@@ -3090,7 +3004,7 @@
           <a:p>
             <a:fld id="{F1465E3F-0B9F-47C9-9E08-5C827E095B3E}" type="datetimeFigureOut">
               <a:rPr lang="en-DK" smtClean="0"/>
-              <a:t>23/02/2026</a:t>
+              <a:t>25/02/2026</a:t>
             </a:fld>
             <a:endParaRPr lang="en-DK"/>
           </a:p>
@@ -3303,7 +3217,7 @@
           <a:p>
             <a:fld id="{F1465E3F-0B9F-47C9-9E08-5C827E095B3E}" type="datetimeFigureOut">
               <a:rPr lang="en-DK" smtClean="0"/>
-              <a:t>23/02/2026</a:t>
+              <a:t>25/02/2026</a:t>
             </a:fld>
             <a:endParaRPr lang="en-DK"/>
           </a:p>
@@ -3708,6 +3622,37 @@
           <a:chExt cx="0" cy="0"/>
         </a:xfrm>
       </p:grpSpPr>
+      <p:pic>
+        <p:nvPicPr>
+          <p:cNvPr id="5" name="Picture 4" descr="The image depicts a software interface with various sections for managing system logging, including log levels, directory, and API key configurations.&#10;&#10;AI-generated content may be incorrect.">
+            <a:extLst>
+              <a:ext uri="{FF2B5EF4-FFF2-40B4-BE49-F238E27FC236}">
+                <a16:creationId xmlns:a16="http://schemas.microsoft.com/office/drawing/2014/main" id="{A9ADDF94-677B-79A6-0C04-282C93229356}"/>
+              </a:ext>
+            </a:extLst>
+          </p:cNvPr>
+          <p:cNvPicPr>
+            <a:picLocks noChangeAspect="1"/>
+          </p:cNvPicPr>
+          <p:nvPr/>
+        </p:nvPicPr>
+        <p:blipFill>
+          <a:blip r:embed="rId3"/>
+          <a:srcRect l="161" r="-1"/>
+          <a:stretch>
+            <a:fillRect/>
+          </a:stretch>
+        </p:blipFill>
+        <p:spPr>
+          <a:xfrm>
+            <a:off x="6425498" y="4518445"/>
+            <a:ext cx="7200000" cy="4413190"/>
+          </a:xfrm>
+          <a:prstGeom prst="rect">
+            <a:avLst/>
+          </a:prstGeom>
+        </p:spPr>
+      </p:pic>
     </p:spTree>
     <p:extLst>
       <p:ext uri="{BB962C8B-B14F-4D97-AF65-F5344CB8AC3E}">
@@ -3738,10 +3683,819 @@
           <a:chExt cx="0" cy="0"/>
         </a:xfrm>
       </p:grpSpPr>
+      <p:pic>
+        <p:nvPicPr>
+          <p:cNvPr id="3" name="Picture 2" descr="The image depicts a user interface showing an enabled access control system, a display calibration feature, and a license status.&#10;&#10;AI-generated content may be incorrect.">
+            <a:extLst>
+              <a:ext uri="{FF2B5EF4-FFF2-40B4-BE49-F238E27FC236}">
+                <a16:creationId xmlns:a16="http://schemas.microsoft.com/office/drawing/2014/main" id="{977D2149-9A3E-18D6-D602-A2FC839FAA9C}"/>
+              </a:ext>
+            </a:extLst>
+          </p:cNvPr>
+          <p:cNvPicPr>
+            <a:picLocks noChangeAspect="1"/>
+          </p:cNvPicPr>
+          <p:nvPr/>
+        </p:nvPicPr>
+        <p:blipFill>
+          <a:blip r:embed="rId2"/>
+          <a:stretch>
+            <a:fillRect/>
+          </a:stretch>
+        </p:blipFill>
+        <p:spPr>
+          <a:xfrm>
+            <a:off x="6442261" y="4518445"/>
+            <a:ext cx="7200000" cy="4430164"/>
+          </a:xfrm>
+          <a:prstGeom prst="rect">
+            <a:avLst/>
+          </a:prstGeom>
+        </p:spPr>
+      </p:pic>
     </p:spTree>
     <p:extLst>
       <p:ext uri="{BB962C8B-B14F-4D97-AF65-F5344CB8AC3E}">
-        <p14:creationId xmlns:p14="http://schemas.microsoft.com/office/powerpoint/2010/main" val="2435479675"/>
+        <p14:creationId xmlns:p14="http://schemas.microsoft.com/office/powerpoint/2010/main" val="2686213192"/>
+      </p:ext>
+    </p:extLst>
+  </p:cSld>
+  <p:clrMapOvr>
+    <a:masterClrMapping/>
+  </p:clrMapOvr>
+</p:sld>
+</file>
+
+<file path=ppt/slides/slide3.xml><?xml version="1.0" encoding="utf-8"?>
+<p:sld xmlns:a="http://schemas.openxmlformats.org/drawingml/2006/main" xmlns:r="http://schemas.openxmlformats.org/officeDocument/2006/relationships" xmlns:p="http://schemas.openxmlformats.org/presentationml/2006/main">
+  <p:cSld>
+    <p:spTree>
+      <p:nvGrpSpPr>
+        <p:cNvPr id="1" name=""/>
+        <p:cNvGrpSpPr/>
+        <p:nvPr/>
+      </p:nvGrpSpPr>
+      <p:grpSpPr>
+        <a:xfrm>
+          <a:off x="0" y="0"/>
+          <a:ext cx="0" cy="0"/>
+          <a:chOff x="0" y="0"/>
+          <a:chExt cx="0" cy="0"/>
+        </a:xfrm>
+      </p:grpSpPr>
+      <p:pic>
+        <p:nvPicPr>
+          <p:cNvPr id="3" name="Picture 2" descr="The image displays a computer monitor setup with calibration and configuration options, including fiducial size, monitor position, and participant distance.&#10;&#10;AI-generated content may be incorrect.">
+            <a:extLst>
+              <a:ext uri="{FF2B5EF4-FFF2-40B4-BE49-F238E27FC236}">
+                <a16:creationId xmlns:a16="http://schemas.microsoft.com/office/drawing/2014/main" id="{89653660-7A33-9B85-4105-2D4887E4E54E}"/>
+              </a:ext>
+            </a:extLst>
+          </p:cNvPr>
+          <p:cNvPicPr>
+            <a:picLocks noChangeAspect="1"/>
+          </p:cNvPicPr>
+          <p:nvPr/>
+        </p:nvPicPr>
+        <p:blipFill>
+          <a:blip r:embed="rId2"/>
+          <a:srcRect l="418"/>
+          <a:stretch>
+            <a:fillRect/>
+          </a:stretch>
+        </p:blipFill>
+        <p:spPr>
+          <a:xfrm>
+            <a:off x="4928379" y="4566076"/>
+            <a:ext cx="7200000" cy="3229640"/>
+          </a:xfrm>
+          <a:prstGeom prst="rect">
+            <a:avLst/>
+          </a:prstGeom>
+        </p:spPr>
+      </p:pic>
+      <p:sp>
+        <p:nvSpPr>
+          <p:cNvPr id="4" name="Oval 3">
+            <a:extLst>
+              <a:ext uri="{FF2B5EF4-FFF2-40B4-BE49-F238E27FC236}">
+                <a16:creationId xmlns:a16="http://schemas.microsoft.com/office/drawing/2014/main" id="{0AC00319-E252-1578-57AF-B1035FA9E941}"/>
+              </a:ext>
+            </a:extLst>
+          </p:cNvPr>
+          <p:cNvSpPr/>
+          <p:nvPr/>
+        </p:nvSpPr>
+        <p:spPr>
+          <a:xfrm>
+            <a:off x="11825579" y="4765888"/>
+            <a:ext cx="252000" cy="252000"/>
+          </a:xfrm>
+          <a:prstGeom prst="ellipse">
+            <a:avLst/>
+          </a:prstGeom>
+          <a:noFill/>
+          <a:ln>
+            <a:solidFill>
+              <a:srgbClr val="FF0000"/>
+            </a:solidFill>
+          </a:ln>
+        </p:spPr>
+        <p:style>
+          <a:lnRef idx="2">
+            <a:schemeClr val="accent1">
+              <a:shade val="15000"/>
+            </a:schemeClr>
+          </a:lnRef>
+          <a:fillRef idx="1">
+            <a:schemeClr val="accent1"/>
+          </a:fillRef>
+          <a:effectRef idx="0">
+            <a:schemeClr val="accent1"/>
+          </a:effectRef>
+          <a:fontRef idx="minor">
+            <a:schemeClr val="lt1"/>
+          </a:fontRef>
+        </p:style>
+        <p:txBody>
+          <a:bodyPr rtlCol="0" anchor="ctr"/>
+          <a:lstStyle/>
+          <a:p>
+            <a:pPr algn="ctr"/>
+            <a:endParaRPr lang="en-DK"/>
+          </a:p>
+        </p:txBody>
+      </p:sp>
+      <p:sp>
+        <p:nvSpPr>
+          <p:cNvPr id="5" name="TextBox 4">
+            <a:extLst>
+              <a:ext uri="{FF2B5EF4-FFF2-40B4-BE49-F238E27FC236}">
+                <a16:creationId xmlns:a16="http://schemas.microsoft.com/office/drawing/2014/main" id="{3E090F58-26EF-162C-E863-289224A237DC}"/>
+              </a:ext>
+            </a:extLst>
+          </p:cNvPr>
+          <p:cNvSpPr txBox="1"/>
+          <p:nvPr/>
+        </p:nvSpPr>
+        <p:spPr>
+          <a:xfrm>
+            <a:off x="11022029" y="4096838"/>
+            <a:ext cx="1859099" cy="369332"/>
+          </a:xfrm>
+          <a:prstGeom prst="rect">
+            <a:avLst/>
+          </a:prstGeom>
+          <a:noFill/>
+        </p:spPr>
+        <p:txBody>
+          <a:bodyPr wrap="none" rtlCol="0">
+            <a:spAutoFit/>
+          </a:bodyPr>
+          <a:lstStyle/>
+          <a:p>
+            <a:r>
+              <a:rPr lang="en-US" dirty="0"/>
+              <a:t>Calibrate display</a:t>
+            </a:r>
+            <a:endParaRPr lang="en-DK" dirty="0"/>
+          </a:p>
+        </p:txBody>
+      </p:sp>
+      <p:cxnSp>
+        <p:nvCxnSpPr>
+          <p:cNvPr id="7" name="Straight Arrow Connector 6">
+            <a:extLst>
+              <a:ext uri="{FF2B5EF4-FFF2-40B4-BE49-F238E27FC236}">
+                <a16:creationId xmlns:a16="http://schemas.microsoft.com/office/drawing/2014/main" id="{98082921-A7D8-4FC2-F47E-57DCB34550A2}"/>
+              </a:ext>
+            </a:extLst>
+          </p:cNvPr>
+          <p:cNvCxnSpPr>
+            <a:stCxn id="5" idx="2"/>
+            <a:endCxn id="4" idx="0"/>
+          </p:cNvCxnSpPr>
+          <p:nvPr/>
+        </p:nvCxnSpPr>
+        <p:spPr>
+          <a:xfrm>
+            <a:off x="11951579" y="4466170"/>
+            <a:ext cx="0" cy="299718"/>
+          </a:xfrm>
+          <a:prstGeom prst="straightConnector1">
+            <a:avLst/>
+          </a:prstGeom>
+          <a:ln w="28575">
+            <a:solidFill>
+              <a:srgbClr val="FF0000"/>
+            </a:solidFill>
+            <a:tailEnd type="triangle"/>
+          </a:ln>
+        </p:spPr>
+        <p:style>
+          <a:lnRef idx="2">
+            <a:schemeClr val="accent1"/>
+          </a:lnRef>
+          <a:fillRef idx="0">
+            <a:schemeClr val="accent1"/>
+          </a:fillRef>
+          <a:effectRef idx="1">
+            <a:schemeClr val="accent1"/>
+          </a:effectRef>
+          <a:fontRef idx="minor">
+            <a:schemeClr val="tx1"/>
+          </a:fontRef>
+        </p:style>
+      </p:cxnSp>
+    </p:spTree>
+    <p:extLst>
+      <p:ext uri="{BB962C8B-B14F-4D97-AF65-F5344CB8AC3E}">
+        <p14:creationId xmlns:p14="http://schemas.microsoft.com/office/powerpoint/2010/main" val="1433800362"/>
+      </p:ext>
+    </p:extLst>
+  </p:cSld>
+  <p:clrMapOvr>
+    <a:masterClrMapping/>
+  </p:clrMapOvr>
+</p:sld>
+</file>
+
+<file path=ppt/slides/slide4.xml><?xml version="1.0" encoding="utf-8"?>
+<p:sld xmlns:a="http://schemas.openxmlformats.org/drawingml/2006/main" xmlns:r="http://schemas.openxmlformats.org/officeDocument/2006/relationships" xmlns:p="http://schemas.openxmlformats.org/presentationml/2006/main">
+  <p:cSld>
+    <p:spTree>
+      <p:nvGrpSpPr>
+        <p:cNvPr id="1" name=""/>
+        <p:cNvGrpSpPr/>
+        <p:nvPr/>
+      </p:nvGrpSpPr>
+      <p:grpSpPr>
+        <a:xfrm>
+          <a:off x="0" y="0"/>
+          <a:ext cx="0" cy="0"/>
+          <a:chOff x="0" y="0"/>
+          <a:chExt cx="0" cy="0"/>
+        </a:xfrm>
+      </p:grpSpPr>
+      <p:grpSp>
+        <p:nvGrpSpPr>
+          <p:cNvPr id="6" name="Group 5">
+            <a:extLst>
+              <a:ext uri="{FF2B5EF4-FFF2-40B4-BE49-F238E27FC236}">
+                <a16:creationId xmlns:a16="http://schemas.microsoft.com/office/drawing/2014/main" id="{56491ACD-546A-629E-51B5-827B3BF72F56}"/>
+              </a:ext>
+            </a:extLst>
+          </p:cNvPr>
+          <p:cNvGrpSpPr/>
+          <p:nvPr/>
+        </p:nvGrpSpPr>
+        <p:grpSpPr>
+          <a:xfrm>
+            <a:off x="3605613" y="4518445"/>
+            <a:ext cx="7194943" cy="3789292"/>
+            <a:chOff x="4199247" y="2820274"/>
+            <a:chExt cx="10183646" cy="5363323"/>
+          </a:xfrm>
+        </p:grpSpPr>
+        <p:pic>
+          <p:nvPicPr>
+            <p:cNvPr id="3" name="Picture 2" descr="The image displays a digital interface with fields for license information, including the holder's name, contact details, type of license, and a validity check for third-party equipment usage.&#10;&#10;AI-generated content may be incorrect.">
+              <a:extLst>
+                <a:ext uri="{FF2B5EF4-FFF2-40B4-BE49-F238E27FC236}">
+                  <a16:creationId xmlns:a16="http://schemas.microsoft.com/office/drawing/2014/main" id="{ACDE15FA-0E08-6F64-9298-648899A7146A}"/>
+                </a:ext>
+              </a:extLst>
+            </p:cNvPr>
+            <p:cNvPicPr>
+              <a:picLocks noChangeAspect="1"/>
+            </p:cNvPicPr>
+            <p:nvPr/>
+          </p:nvPicPr>
+          <p:blipFill>
+            <a:blip r:embed="rId2"/>
+            <a:stretch>
+              <a:fillRect/>
+            </a:stretch>
+          </p:blipFill>
+          <p:spPr>
+            <a:xfrm>
+              <a:off x="4199247" y="2820274"/>
+              <a:ext cx="10183646" cy="5363323"/>
+            </a:xfrm>
+            <a:prstGeom prst="rect">
+              <a:avLst/>
+            </a:prstGeom>
+          </p:spPr>
+        </p:pic>
+        <p:sp>
+          <p:nvSpPr>
+            <p:cNvPr id="4" name="Rectangle 3">
+              <a:extLst>
+                <a:ext uri="{FF2B5EF4-FFF2-40B4-BE49-F238E27FC236}">
+                  <a16:creationId xmlns:a16="http://schemas.microsoft.com/office/drawing/2014/main" id="{7F230108-36DF-9FCB-7F01-72CD0E178A0F}"/>
+                </a:ext>
+              </a:extLst>
+            </p:cNvPr>
+            <p:cNvSpPr/>
+            <p:nvPr/>
+          </p:nvSpPr>
+          <p:spPr>
+            <a:xfrm>
+              <a:off x="10177463" y="5129213"/>
+              <a:ext cx="1400175" cy="223837"/>
+            </a:xfrm>
+            <a:prstGeom prst="rect">
+              <a:avLst/>
+            </a:prstGeom>
+            <a:solidFill>
+              <a:schemeClr val="bg1"/>
+            </a:solidFill>
+            <a:ln>
+              <a:noFill/>
+            </a:ln>
+          </p:spPr>
+          <p:style>
+            <a:lnRef idx="2">
+              <a:schemeClr val="accent1">
+                <a:shade val="15000"/>
+              </a:schemeClr>
+            </a:lnRef>
+            <a:fillRef idx="1">
+              <a:schemeClr val="accent1"/>
+            </a:fillRef>
+            <a:effectRef idx="0">
+              <a:schemeClr val="accent1"/>
+            </a:effectRef>
+            <a:fontRef idx="minor">
+              <a:schemeClr val="lt1"/>
+            </a:fontRef>
+          </p:style>
+          <p:txBody>
+            <a:bodyPr rtlCol="0" anchor="ctr"/>
+            <a:lstStyle/>
+            <a:p>
+              <a:pPr algn="ctr"/>
+              <a:endParaRPr lang="en-DK"/>
+            </a:p>
+          </p:txBody>
+        </p:sp>
+        <p:sp>
+          <p:nvSpPr>
+            <p:cNvPr id="5" name="Rectangle 4">
+              <a:extLst>
+                <a:ext uri="{FF2B5EF4-FFF2-40B4-BE49-F238E27FC236}">
+                  <a16:creationId xmlns:a16="http://schemas.microsoft.com/office/drawing/2014/main" id="{4E5CFFA0-FFC7-55A8-E342-270D8B52EF80}"/>
+                </a:ext>
+              </a:extLst>
+            </p:cNvPr>
+            <p:cNvSpPr/>
+            <p:nvPr/>
+          </p:nvSpPr>
+          <p:spPr>
+            <a:xfrm>
+              <a:off x="10177463" y="5390016"/>
+              <a:ext cx="1400175" cy="223837"/>
+            </a:xfrm>
+            <a:prstGeom prst="rect">
+              <a:avLst/>
+            </a:prstGeom>
+            <a:solidFill>
+              <a:schemeClr val="bg1"/>
+            </a:solidFill>
+            <a:ln>
+              <a:noFill/>
+            </a:ln>
+          </p:spPr>
+          <p:style>
+            <a:lnRef idx="2">
+              <a:schemeClr val="accent1">
+                <a:shade val="15000"/>
+              </a:schemeClr>
+            </a:lnRef>
+            <a:fillRef idx="1">
+              <a:schemeClr val="accent1"/>
+            </a:fillRef>
+            <a:effectRef idx="0">
+              <a:schemeClr val="accent1"/>
+            </a:effectRef>
+            <a:fontRef idx="minor">
+              <a:schemeClr val="lt1"/>
+            </a:fontRef>
+          </p:style>
+          <p:txBody>
+            <a:bodyPr rtlCol="0" anchor="ctr"/>
+            <a:lstStyle/>
+            <a:p>
+              <a:pPr algn="ctr"/>
+              <a:endParaRPr lang="en-DK"/>
+            </a:p>
+          </p:txBody>
+        </p:sp>
+      </p:grpSp>
+      <p:sp>
+        <p:nvSpPr>
+          <p:cNvPr id="7" name="Oval 6">
+            <a:extLst>
+              <a:ext uri="{FF2B5EF4-FFF2-40B4-BE49-F238E27FC236}">
+                <a16:creationId xmlns:a16="http://schemas.microsoft.com/office/drawing/2014/main" id="{9BCA02C9-66CC-7F9B-0606-AD639F06B391}"/>
+              </a:ext>
+            </a:extLst>
+          </p:cNvPr>
+          <p:cNvSpPr/>
+          <p:nvPr/>
+        </p:nvSpPr>
+        <p:spPr>
+          <a:xfrm>
+            <a:off x="10384129" y="4753188"/>
+            <a:ext cx="288000" cy="288000"/>
+          </a:xfrm>
+          <a:prstGeom prst="ellipse">
+            <a:avLst/>
+          </a:prstGeom>
+          <a:noFill/>
+          <a:ln>
+            <a:solidFill>
+              <a:srgbClr val="FF0000"/>
+            </a:solidFill>
+          </a:ln>
+        </p:spPr>
+        <p:style>
+          <a:lnRef idx="2">
+            <a:schemeClr val="accent1">
+              <a:shade val="15000"/>
+            </a:schemeClr>
+          </a:lnRef>
+          <a:fillRef idx="1">
+            <a:schemeClr val="accent1"/>
+          </a:fillRef>
+          <a:effectRef idx="0">
+            <a:schemeClr val="accent1"/>
+          </a:effectRef>
+          <a:fontRef idx="minor">
+            <a:schemeClr val="lt1"/>
+          </a:fontRef>
+        </p:style>
+        <p:txBody>
+          <a:bodyPr rtlCol="0" anchor="ctr"/>
+          <a:lstStyle/>
+          <a:p>
+            <a:pPr algn="ctr"/>
+            <a:endParaRPr lang="en-DK"/>
+          </a:p>
+        </p:txBody>
+      </p:sp>
+      <p:sp>
+        <p:nvSpPr>
+          <p:cNvPr id="8" name="Oval 7">
+            <a:extLst>
+              <a:ext uri="{FF2B5EF4-FFF2-40B4-BE49-F238E27FC236}">
+                <a16:creationId xmlns:a16="http://schemas.microsoft.com/office/drawing/2014/main" id="{4CC66D21-14BE-64CE-983A-DB9D86EE83A1}"/>
+              </a:ext>
+            </a:extLst>
+          </p:cNvPr>
+          <p:cNvSpPr/>
+          <p:nvPr/>
+        </p:nvSpPr>
+        <p:spPr>
+          <a:xfrm>
+            <a:off x="10315279" y="5305638"/>
+            <a:ext cx="288000" cy="288000"/>
+          </a:xfrm>
+          <a:prstGeom prst="ellipse">
+            <a:avLst/>
+          </a:prstGeom>
+          <a:noFill/>
+          <a:ln>
+            <a:solidFill>
+              <a:srgbClr val="FF0000"/>
+            </a:solidFill>
+          </a:ln>
+        </p:spPr>
+        <p:style>
+          <a:lnRef idx="2">
+            <a:schemeClr val="accent1">
+              <a:shade val="15000"/>
+            </a:schemeClr>
+          </a:lnRef>
+          <a:fillRef idx="1">
+            <a:schemeClr val="accent1"/>
+          </a:fillRef>
+          <a:effectRef idx="0">
+            <a:schemeClr val="accent1"/>
+          </a:effectRef>
+          <a:fontRef idx="minor">
+            <a:schemeClr val="lt1"/>
+          </a:fontRef>
+        </p:style>
+        <p:txBody>
+          <a:bodyPr rtlCol="0" anchor="ctr"/>
+          <a:lstStyle/>
+          <a:p>
+            <a:pPr algn="ctr"/>
+            <a:endParaRPr lang="en-DK"/>
+          </a:p>
+        </p:txBody>
+      </p:sp>
+      <p:sp>
+        <p:nvSpPr>
+          <p:cNvPr id="9" name="Oval 8">
+            <a:extLst>
+              <a:ext uri="{FF2B5EF4-FFF2-40B4-BE49-F238E27FC236}">
+                <a16:creationId xmlns:a16="http://schemas.microsoft.com/office/drawing/2014/main" id="{49073931-3C18-C863-875E-3686468A1ABC}"/>
+              </a:ext>
+            </a:extLst>
+          </p:cNvPr>
+          <p:cNvSpPr/>
+          <p:nvPr/>
+        </p:nvSpPr>
+        <p:spPr>
+          <a:xfrm>
+            <a:off x="9974002" y="5305638"/>
+            <a:ext cx="288000" cy="288000"/>
+          </a:xfrm>
+          <a:prstGeom prst="ellipse">
+            <a:avLst/>
+          </a:prstGeom>
+          <a:noFill/>
+          <a:ln>
+            <a:solidFill>
+              <a:srgbClr val="FF0000"/>
+            </a:solidFill>
+          </a:ln>
+        </p:spPr>
+        <p:style>
+          <a:lnRef idx="2">
+            <a:schemeClr val="accent1">
+              <a:shade val="15000"/>
+            </a:schemeClr>
+          </a:lnRef>
+          <a:fillRef idx="1">
+            <a:schemeClr val="accent1"/>
+          </a:fillRef>
+          <a:effectRef idx="0">
+            <a:schemeClr val="accent1"/>
+          </a:effectRef>
+          <a:fontRef idx="minor">
+            <a:schemeClr val="lt1"/>
+          </a:fontRef>
+        </p:style>
+        <p:txBody>
+          <a:bodyPr rtlCol="0" anchor="ctr"/>
+          <a:lstStyle/>
+          <a:p>
+            <a:pPr algn="ctr"/>
+            <a:endParaRPr lang="en-DK"/>
+          </a:p>
+        </p:txBody>
+      </p:sp>
+      <p:sp>
+        <p:nvSpPr>
+          <p:cNvPr id="10" name="TextBox 9">
+            <a:extLst>
+              <a:ext uri="{FF2B5EF4-FFF2-40B4-BE49-F238E27FC236}">
+                <a16:creationId xmlns:a16="http://schemas.microsoft.com/office/drawing/2014/main" id="{3043C381-BA41-667A-956B-28628958C8F1}"/>
+              </a:ext>
+            </a:extLst>
+          </p:cNvPr>
+          <p:cNvSpPr txBox="1"/>
+          <p:nvPr/>
+        </p:nvSpPr>
+        <p:spPr>
+          <a:xfrm>
+            <a:off x="10934542" y="4712522"/>
+            <a:ext cx="1761123" cy="369332"/>
+          </a:xfrm>
+          <a:prstGeom prst="rect">
+            <a:avLst/>
+          </a:prstGeom>
+          <a:noFill/>
+        </p:spPr>
+        <p:txBody>
+          <a:bodyPr wrap="none" rtlCol="0">
+            <a:spAutoFit/>
+          </a:bodyPr>
+          <a:lstStyle/>
+          <a:p>
+            <a:r>
+              <a:rPr lang="en-US" dirty="0"/>
+              <a:t>Register license</a:t>
+            </a:r>
+            <a:endParaRPr lang="en-DK" dirty="0"/>
+          </a:p>
+        </p:txBody>
+      </p:sp>
+      <p:sp>
+        <p:nvSpPr>
+          <p:cNvPr id="11" name="TextBox 10">
+            <a:extLst>
+              <a:ext uri="{FF2B5EF4-FFF2-40B4-BE49-F238E27FC236}">
+                <a16:creationId xmlns:a16="http://schemas.microsoft.com/office/drawing/2014/main" id="{EAFAD287-934B-8F75-766C-9D85B6D8C77B}"/>
+              </a:ext>
+            </a:extLst>
+          </p:cNvPr>
+          <p:cNvSpPr txBox="1"/>
+          <p:nvPr/>
+        </p:nvSpPr>
+        <p:spPr>
+          <a:xfrm>
+            <a:off x="10934542" y="5264972"/>
+            <a:ext cx="1975990" cy="369332"/>
+          </a:xfrm>
+          <a:prstGeom prst="rect">
+            <a:avLst/>
+          </a:prstGeom>
+          <a:noFill/>
+        </p:spPr>
+        <p:txBody>
+          <a:bodyPr wrap="none" rtlCol="0">
+            <a:spAutoFit/>
+          </a:bodyPr>
+          <a:lstStyle/>
+          <a:p>
+            <a:r>
+              <a:rPr lang="en-US" dirty="0"/>
+              <a:t>Deregister license</a:t>
+            </a:r>
+            <a:endParaRPr lang="en-DK" dirty="0"/>
+          </a:p>
+        </p:txBody>
+      </p:sp>
+      <p:sp>
+        <p:nvSpPr>
+          <p:cNvPr id="12" name="TextBox 11">
+            <a:extLst>
+              <a:ext uri="{FF2B5EF4-FFF2-40B4-BE49-F238E27FC236}">
+                <a16:creationId xmlns:a16="http://schemas.microsoft.com/office/drawing/2014/main" id="{0F376539-F264-1F5C-76A9-DA45B741B141}"/>
+              </a:ext>
+            </a:extLst>
+          </p:cNvPr>
+          <p:cNvSpPr txBox="1"/>
+          <p:nvPr/>
+        </p:nvSpPr>
+        <p:spPr>
+          <a:xfrm>
+            <a:off x="10934542" y="5780423"/>
+            <a:ext cx="1713995" cy="369332"/>
+          </a:xfrm>
+          <a:prstGeom prst="rect">
+            <a:avLst/>
+          </a:prstGeom>
+          <a:noFill/>
+        </p:spPr>
+        <p:txBody>
+          <a:bodyPr wrap="none" rtlCol="0">
+            <a:spAutoFit/>
+          </a:bodyPr>
+          <a:lstStyle/>
+          <a:p>
+            <a:r>
+              <a:rPr lang="en-US" dirty="0"/>
+              <a:t>Refresh license</a:t>
+            </a:r>
+            <a:endParaRPr lang="en-DK" dirty="0"/>
+          </a:p>
+        </p:txBody>
+      </p:sp>
+      <p:cxnSp>
+        <p:nvCxnSpPr>
+          <p:cNvPr id="14" name="Straight Arrow Connector 13">
+            <a:extLst>
+              <a:ext uri="{FF2B5EF4-FFF2-40B4-BE49-F238E27FC236}">
+                <a16:creationId xmlns:a16="http://schemas.microsoft.com/office/drawing/2014/main" id="{C8B76E38-1888-6C25-47D9-4AEBCD4A12D5}"/>
+              </a:ext>
+            </a:extLst>
+          </p:cNvPr>
+          <p:cNvCxnSpPr>
+            <a:stCxn id="10" idx="1"/>
+            <a:endCxn id="7" idx="6"/>
+          </p:cNvCxnSpPr>
+          <p:nvPr/>
+        </p:nvCxnSpPr>
+        <p:spPr>
+          <a:xfrm flipH="1">
+            <a:off x="10672129" y="4897188"/>
+            <a:ext cx="262413" cy="0"/>
+          </a:xfrm>
+          <a:prstGeom prst="straightConnector1">
+            <a:avLst/>
+          </a:prstGeom>
+          <a:ln w="28575">
+            <a:solidFill>
+              <a:srgbClr val="FF0000"/>
+            </a:solidFill>
+            <a:tailEnd type="triangle"/>
+          </a:ln>
+        </p:spPr>
+        <p:style>
+          <a:lnRef idx="2">
+            <a:schemeClr val="accent1"/>
+          </a:lnRef>
+          <a:fillRef idx="0">
+            <a:schemeClr val="accent1"/>
+          </a:fillRef>
+          <a:effectRef idx="1">
+            <a:schemeClr val="accent1"/>
+          </a:effectRef>
+          <a:fontRef idx="minor">
+            <a:schemeClr val="tx1"/>
+          </a:fontRef>
+        </p:style>
+      </p:cxnSp>
+      <p:cxnSp>
+        <p:nvCxnSpPr>
+          <p:cNvPr id="15" name="Straight Arrow Connector 14">
+            <a:extLst>
+              <a:ext uri="{FF2B5EF4-FFF2-40B4-BE49-F238E27FC236}">
+                <a16:creationId xmlns:a16="http://schemas.microsoft.com/office/drawing/2014/main" id="{0E45D4CE-AC4A-B06A-06BD-35382B17ADA0}"/>
+              </a:ext>
+            </a:extLst>
+          </p:cNvPr>
+          <p:cNvCxnSpPr>
+            <a:cxnSpLocks/>
+            <a:stCxn id="11" idx="1"/>
+            <a:endCxn id="8" idx="6"/>
+          </p:cNvCxnSpPr>
+          <p:nvPr/>
+        </p:nvCxnSpPr>
+        <p:spPr>
+          <a:xfrm flipH="1">
+            <a:off x="10603279" y="5449638"/>
+            <a:ext cx="331263" cy="0"/>
+          </a:xfrm>
+          <a:prstGeom prst="straightConnector1">
+            <a:avLst/>
+          </a:prstGeom>
+          <a:ln w="28575">
+            <a:solidFill>
+              <a:srgbClr val="FF0000"/>
+            </a:solidFill>
+            <a:tailEnd type="triangle"/>
+          </a:ln>
+        </p:spPr>
+        <p:style>
+          <a:lnRef idx="2">
+            <a:schemeClr val="accent1"/>
+          </a:lnRef>
+          <a:fillRef idx="0">
+            <a:schemeClr val="accent1"/>
+          </a:fillRef>
+          <a:effectRef idx="1">
+            <a:schemeClr val="accent1"/>
+          </a:effectRef>
+          <a:fontRef idx="minor">
+            <a:schemeClr val="tx1"/>
+          </a:fontRef>
+        </p:style>
+      </p:cxnSp>
+      <p:cxnSp>
+        <p:nvCxnSpPr>
+          <p:cNvPr id="20" name="Connector: Elbow 19">
+            <a:extLst>
+              <a:ext uri="{FF2B5EF4-FFF2-40B4-BE49-F238E27FC236}">
+                <a16:creationId xmlns:a16="http://schemas.microsoft.com/office/drawing/2014/main" id="{E25E8CBD-67FF-C907-3618-5037005EF899}"/>
+              </a:ext>
+            </a:extLst>
+          </p:cNvPr>
+          <p:cNvCxnSpPr>
+            <a:stCxn id="12" idx="1"/>
+            <a:endCxn id="9" idx="4"/>
+          </p:cNvCxnSpPr>
+          <p:nvPr/>
+        </p:nvCxnSpPr>
+        <p:spPr>
+          <a:xfrm rot="10800000">
+            <a:off x="10118002" y="5593639"/>
+            <a:ext cx="816540" cy="371451"/>
+          </a:xfrm>
+          <a:prstGeom prst="bentConnector2">
+            <a:avLst/>
+          </a:prstGeom>
+          <a:ln w="28575">
+            <a:solidFill>
+              <a:srgbClr val="FF0000"/>
+            </a:solidFill>
+            <a:tailEnd type="triangle"/>
+          </a:ln>
+        </p:spPr>
+        <p:style>
+          <a:lnRef idx="2">
+            <a:schemeClr val="accent1"/>
+          </a:lnRef>
+          <a:fillRef idx="0">
+            <a:schemeClr val="accent1"/>
+          </a:fillRef>
+          <a:effectRef idx="1">
+            <a:schemeClr val="accent1"/>
+          </a:effectRef>
+          <a:fontRef idx="minor">
+            <a:schemeClr val="tx1"/>
+          </a:fontRef>
+        </p:style>
+      </p:cxnSp>
+    </p:spTree>
+    <p:extLst>
+      <p:ext uri="{BB962C8B-B14F-4D97-AF65-F5344CB8AC3E}">
+        <p14:creationId xmlns:p14="http://schemas.microsoft.com/office/powerpoint/2010/main" val="749346432"/>
       </p:ext>
     </p:extLst>
   </p:cSld>
@@ -4637,6 +5391,15 @@
 </file>
 
 <file path=customXml/item2.xml><?xml version="1.0" encoding="utf-8"?>
+<?mso-contentType ?>
+<FormTemplates xmlns="http://schemas.microsoft.com/sharepoint/v3/contenttype/forms">
+  <Display>DocumentLibraryForm</Display>
+  <Edit>DocumentLibraryForm</Edit>
+  <New>DocumentLibraryForm</New>
+</FormTemplates>
+</file>
+
+<file path=customXml/item3.xml><?xml version="1.0" encoding="utf-8"?>
 <p:properties xmlns:p="http://schemas.microsoft.com/office/2006/metadata/properties" xmlns:xsi="http://www.w3.org/2001/XMLSchema-instance" xmlns:pc="http://schemas.microsoft.com/office/infopath/2007/PartnerControls">
   <documentManagement>
     <TaxCatchAll xmlns="6dfb7b4b-871d-4c24-9d42-16b14ecd044c" xsi:nil="true"/>
@@ -4645,15 +5408,6 @@
     </lcf76f155ced4ddcb4097134ff3c332f>
   </documentManagement>
 </p:properties>
-</file>
-
-<file path=customXml/item3.xml><?xml version="1.0" encoding="utf-8"?>
-<?mso-contentType ?>
-<FormTemplates xmlns="http://schemas.microsoft.com/sharepoint/v3/contenttype/forms">
-  <Display>DocumentLibraryForm</Display>
-  <Edit>DocumentLibraryForm</Edit>
-  <New>DocumentLibraryForm</New>
-</FormTemplates>
 </file>
 
 <file path=customXml/itemProps1.xml><?xml version="1.0" encoding="utf-8"?>
@@ -4676,6 +5430,14 @@
 </file>
 
 <file path=customXml/itemProps2.xml><?xml version="1.0" encoding="utf-8"?>
+<ds:datastoreItem xmlns:ds="http://schemas.openxmlformats.org/officeDocument/2006/customXml" ds:itemID="{EF875D47-8106-485E-98E0-D60C6A98DA6A}">
+  <ds:schemaRefs>
+    <ds:schemaRef ds:uri="http://schemas.microsoft.com/sharepoint/v3/contenttype/forms"/>
+  </ds:schemaRefs>
+</ds:datastoreItem>
+</file>
+
+<file path=customXml/itemProps3.xml><?xml version="1.0" encoding="utf-8"?>
 <ds:datastoreItem xmlns:ds="http://schemas.openxmlformats.org/officeDocument/2006/customXml" ds:itemID="{2EF670CE-B0AA-4D52-AFC6-AA4BF7D46EEA}">
   <ds:schemaRefs>
     <ds:schemaRef ds:uri="http://schemas.microsoft.com/office/2006/metadata/properties"/>
@@ -4684,12 +5446,4 @@
     <ds:schemaRef ds:uri="51c7d8ad-74c8-4833-8478-0d0a5cafce0c"/>
   </ds:schemaRefs>
 </ds:datastoreItem>
-</file>
-
-<file path=customXml/itemProps3.xml><?xml version="1.0" encoding="utf-8"?>
-<ds:datastoreItem xmlns:ds="http://schemas.openxmlformats.org/officeDocument/2006/customXml" ds:itemID="{EF875D47-8106-485E-98E0-D60C6A98DA6A}">
-  <ds:schemaRefs>
-    <ds:schemaRef ds:uri="http://schemas.microsoft.com/sharepoint/v3/contenttype/forms"/>
-  </ds:schemaRefs>
-</ds:datastoreItem>
 </file>
--- a/assets/images/Administration_System.pptx
+++ b/assets/images/Administration_System.pptx
@@ -5,13 +5,14 @@
     <p:sldMasterId id="2147483684" r:id="rId4"/>
   </p:sldMasterIdLst>
   <p:notesMasterIdLst>
-    <p:notesMasterId r:id="rId9"/>
+    <p:notesMasterId r:id="rId10"/>
   </p:notesMasterIdLst>
   <p:sldIdLst>
     <p:sldId id="256" r:id="rId5"/>
-    <p:sldId id="258" r:id="rId6"/>
-    <p:sldId id="259" r:id="rId7"/>
-    <p:sldId id="260" r:id="rId8"/>
+    <p:sldId id="261" r:id="rId6"/>
+    <p:sldId id="258" r:id="rId7"/>
+    <p:sldId id="259" r:id="rId8"/>
+    <p:sldId id="260" r:id="rId9"/>
   </p:sldIdLst>
   <p:sldSz cx="21601113" cy="14400213"/>
   <p:notesSz cx="9144000" cy="6858000"/>
@@ -3683,6 +3684,425 @@
           <a:chExt cx="0" cy="0"/>
         </a:xfrm>
       </p:grpSpPr>
+      <p:graphicFrame>
+        <p:nvGraphicFramePr>
+          <p:cNvPr id="9" name="Table 8">
+            <a:extLst>
+              <a:ext uri="{FF2B5EF4-FFF2-40B4-BE49-F238E27FC236}">
+                <a16:creationId xmlns:a16="http://schemas.microsoft.com/office/drawing/2014/main" id="{B3834CAB-8F45-9CCF-7262-11E08381991E}"/>
+              </a:ext>
+            </a:extLst>
+          </p:cNvPr>
+          <p:cNvGraphicFramePr>
+            <a:graphicFrameLocks noGrp="1"/>
+          </p:cNvGraphicFramePr>
+          <p:nvPr>
+            <p:extLst>
+              <p:ext uri="{D42A27DB-BD31-4B8C-83A1-F6EECF244321}">
+                <p14:modId xmlns:p14="http://schemas.microsoft.com/office/powerpoint/2010/main" val="2989771931"/>
+              </p:ext>
+            </p:extLst>
+          </p:nvPr>
+        </p:nvGraphicFramePr>
+        <p:xfrm>
+          <a:off x="7312649" y="3131379"/>
+          <a:ext cx="7222501" cy="2651760"/>
+        </p:xfrm>
+        <a:graphic>
+          <a:graphicData uri="http://schemas.openxmlformats.org/drawingml/2006/table">
+            <a:tbl>
+              <a:tblPr firstRow="1" bandRow="1">
+                <a:tableStyleId>{2D5ABB26-0587-4C30-8999-92F81FD0307C}</a:tableStyleId>
+              </a:tblPr>
+              <a:tblGrid>
+                <a:gridCol w="736341">
+                  <a:extLst>
+                    <a:ext uri="{9D8B030D-6E8A-4147-A177-3AD203B41FA5}">
+                      <a16:colId xmlns:a16="http://schemas.microsoft.com/office/drawing/2014/main" val="3122846708"/>
+                    </a:ext>
+                  </a:extLst>
+                </a:gridCol>
+                <a:gridCol w="6486160">
+                  <a:extLst>
+                    <a:ext uri="{9D8B030D-6E8A-4147-A177-3AD203B41FA5}">
+                      <a16:colId xmlns:a16="http://schemas.microsoft.com/office/drawing/2014/main" val="2537266563"/>
+                    </a:ext>
+                  </a:extLst>
+                </a:gridCol>
+              </a:tblGrid>
+              <a:tr h="370840">
+                <a:tc>
+                  <a:txBody>
+                    <a:bodyPr/>
+                    <a:lstStyle/>
+                    <a:p>
+                      <a:endParaRPr lang="en-DK" sz="1200" dirty="0"/>
+                    </a:p>
+                  </a:txBody>
+                  <a:tcPr>
+                    <a:lnT w="12700" cap="flat" cmpd="sng" algn="ctr">
+                      <a:solidFill>
+                        <a:schemeClr val="tx1"/>
+                      </a:solidFill>
+                      <a:prstDash val="solid"/>
+                      <a:round/>
+                      <a:headEnd type="none" w="med" len="med"/>
+                      <a:tailEnd type="none" w="med" len="med"/>
+                    </a:lnT>
+                    <a:lnB w="12700" cap="flat" cmpd="sng" algn="ctr">
+                      <a:solidFill>
+                        <a:schemeClr val="tx1"/>
+                      </a:solidFill>
+                      <a:prstDash val="solid"/>
+                      <a:round/>
+                      <a:headEnd type="none" w="med" len="med"/>
+                      <a:tailEnd type="none" w="med" len="med"/>
+                    </a:lnB>
+                  </a:tcPr>
+                </a:tc>
+                <a:tc>
+                  <a:txBody>
+                    <a:bodyPr/>
+                    <a:lstStyle/>
+                    <a:p>
+                      <a:r>
+                        <a:rPr lang="en-US" sz="1200" b="1" dirty="0"/>
+                        <a:t>Debug</a:t>
+                      </a:r>
+                    </a:p>
+                    <a:p>
+                      <a:r>
+                        <a:rPr lang="en-US" sz="1200" dirty="0"/>
+                        <a:t>Debug level messages are relevant for debugging errors in a protocol and for understanding error level messages.</a:t>
+                      </a:r>
+                    </a:p>
+                    <a:p>
+                      <a:endParaRPr lang="en-DK" sz="1200" dirty="0"/>
+                    </a:p>
+                  </a:txBody>
+                  <a:tcPr>
+                    <a:lnT w="12700" cap="flat" cmpd="sng" algn="ctr">
+                      <a:solidFill>
+                        <a:schemeClr val="tx1"/>
+                      </a:solidFill>
+                      <a:prstDash val="solid"/>
+                      <a:round/>
+                      <a:headEnd type="none" w="med" len="med"/>
+                      <a:tailEnd type="none" w="med" len="med"/>
+                    </a:lnT>
+                    <a:lnB w="12700" cap="flat" cmpd="sng" algn="ctr">
+                      <a:solidFill>
+                        <a:schemeClr val="tx1"/>
+                      </a:solidFill>
+                      <a:prstDash val="solid"/>
+                      <a:round/>
+                      <a:headEnd type="none" w="med" len="med"/>
+                      <a:tailEnd type="none" w="med" len="med"/>
+                    </a:lnB>
+                  </a:tcPr>
+                </a:tc>
+                <a:extLst>
+                  <a:ext uri="{0D108BD9-81ED-4DB2-BD59-A6C34878D82A}">
+                    <a16:rowId xmlns:a16="http://schemas.microsoft.com/office/drawing/2014/main" val="689519557"/>
+                  </a:ext>
+                </a:extLst>
+              </a:tr>
+              <a:tr h="370840">
+                <a:tc>
+                  <a:txBody>
+                    <a:bodyPr/>
+                    <a:lstStyle/>
+                    <a:p>
+                      <a:endParaRPr lang="en-DK" sz="1200" dirty="0"/>
+                    </a:p>
+                  </a:txBody>
+                  <a:tcPr>
+                    <a:lnT w="12700" cap="flat" cmpd="sng" algn="ctr">
+                      <a:solidFill>
+                        <a:schemeClr val="tx1"/>
+                      </a:solidFill>
+                      <a:prstDash val="solid"/>
+                      <a:round/>
+                      <a:headEnd type="none" w="med" len="med"/>
+                      <a:tailEnd type="none" w="med" len="med"/>
+                    </a:lnT>
+                    <a:lnB w="12700" cap="flat" cmpd="sng" algn="ctr">
+                      <a:solidFill>
+                        <a:schemeClr val="tx1"/>
+                      </a:solidFill>
+                      <a:prstDash val="solid"/>
+                      <a:round/>
+                      <a:headEnd type="none" w="med" len="med"/>
+                      <a:tailEnd type="none" w="med" len="med"/>
+                    </a:lnB>
+                  </a:tcPr>
+                </a:tc>
+                <a:tc>
+                  <a:txBody>
+                    <a:bodyPr/>
+                    <a:lstStyle/>
+                    <a:p>
+                      <a:r>
+                        <a:rPr lang="en-US" sz="1200" b="1" dirty="0"/>
+                        <a:t>Information</a:t>
+                      </a:r>
+                    </a:p>
+                    <a:p>
+                      <a:r>
+                        <a:rPr lang="en-US" sz="1200" dirty="0"/>
+                        <a:t>Information level messages that are relevant for the operator while they are performing a study. These log messages provide information about the normal execution of protocols.</a:t>
+                      </a:r>
+                    </a:p>
+                    <a:p>
+                      <a:endParaRPr lang="en-DK" sz="1200" dirty="0"/>
+                    </a:p>
+                  </a:txBody>
+                  <a:tcPr>
+                    <a:lnT w="12700" cap="flat" cmpd="sng" algn="ctr">
+                      <a:solidFill>
+                        <a:schemeClr val="tx1"/>
+                      </a:solidFill>
+                      <a:prstDash val="solid"/>
+                      <a:round/>
+                      <a:headEnd type="none" w="med" len="med"/>
+                      <a:tailEnd type="none" w="med" len="med"/>
+                    </a:lnT>
+                    <a:lnB w="12700" cap="flat" cmpd="sng" algn="ctr">
+                      <a:solidFill>
+                        <a:schemeClr val="tx1"/>
+                      </a:solidFill>
+                      <a:prstDash val="solid"/>
+                      <a:round/>
+                      <a:headEnd type="none" w="med" len="med"/>
+                      <a:tailEnd type="none" w="med" len="med"/>
+                    </a:lnB>
+                  </a:tcPr>
+                </a:tc>
+                <a:extLst>
+                  <a:ext uri="{0D108BD9-81ED-4DB2-BD59-A6C34878D82A}">
+                    <a16:rowId xmlns:a16="http://schemas.microsoft.com/office/drawing/2014/main" val="1206018093"/>
+                  </a:ext>
+                </a:extLst>
+              </a:tr>
+              <a:tr h="370840">
+                <a:tc>
+                  <a:txBody>
+                    <a:bodyPr/>
+                    <a:lstStyle/>
+                    <a:p>
+                      <a:endParaRPr lang="en-DK" sz="1200"/>
+                    </a:p>
+                  </a:txBody>
+                  <a:tcPr>
+                    <a:lnT w="12700" cap="flat" cmpd="sng" algn="ctr">
+                      <a:solidFill>
+                        <a:schemeClr val="tx1"/>
+                      </a:solidFill>
+                      <a:prstDash val="solid"/>
+                      <a:round/>
+                      <a:headEnd type="none" w="med" len="med"/>
+                      <a:tailEnd type="none" w="med" len="med"/>
+                    </a:lnT>
+                    <a:lnB w="12700" cap="flat" cmpd="sng" algn="ctr">
+                      <a:solidFill>
+                        <a:schemeClr val="tx1"/>
+                      </a:solidFill>
+                      <a:prstDash val="solid"/>
+                      <a:round/>
+                      <a:headEnd type="none" w="med" len="med"/>
+                      <a:tailEnd type="none" w="med" len="med"/>
+                    </a:lnB>
+                  </a:tcPr>
+                </a:tc>
+                <a:tc>
+                  <a:txBody>
+                    <a:bodyPr/>
+                    <a:lstStyle/>
+                    <a:p>
+                      <a:r>
+                        <a:rPr lang="en-US" sz="1200" b="1" dirty="0"/>
+                        <a:t>Error</a:t>
+                      </a:r>
+                    </a:p>
+                    <a:p>
+                      <a:r>
+                        <a:rPr lang="en-US" sz="1200" dirty="0"/>
+                        <a:t>Error level messages that are vital are vital for the operator while they are performing a study. These log messages provide information about events that are abnormal and which prevents the protocol to be performed correctly.</a:t>
+                      </a:r>
+                    </a:p>
+                    <a:p>
+                      <a:endParaRPr lang="en-DK" sz="1200" dirty="0"/>
+                    </a:p>
+                  </a:txBody>
+                  <a:tcPr>
+                    <a:lnT w="12700" cap="flat" cmpd="sng" algn="ctr">
+                      <a:solidFill>
+                        <a:schemeClr val="tx1"/>
+                      </a:solidFill>
+                      <a:prstDash val="solid"/>
+                      <a:round/>
+                      <a:headEnd type="none" w="med" len="med"/>
+                      <a:tailEnd type="none" w="med" len="med"/>
+                    </a:lnT>
+                    <a:lnB w="12700" cap="flat" cmpd="sng" algn="ctr">
+                      <a:solidFill>
+                        <a:schemeClr val="tx1"/>
+                      </a:solidFill>
+                      <a:prstDash val="solid"/>
+                      <a:round/>
+                      <a:headEnd type="none" w="med" len="med"/>
+                      <a:tailEnd type="none" w="med" len="med"/>
+                    </a:lnB>
+                  </a:tcPr>
+                </a:tc>
+                <a:extLst>
+                  <a:ext uri="{0D108BD9-81ED-4DB2-BD59-A6C34878D82A}">
+                    <a16:rowId xmlns:a16="http://schemas.microsoft.com/office/drawing/2014/main" val="3018801594"/>
+                  </a:ext>
+                </a:extLst>
+              </a:tr>
+            </a:tbl>
+          </a:graphicData>
+        </a:graphic>
+      </p:graphicFrame>
+      <p:pic>
+        <p:nvPicPr>
+          <p:cNvPr id="3" name="Picture 2">
+            <a:extLst>
+              <a:ext uri="{FF2B5EF4-FFF2-40B4-BE49-F238E27FC236}">
+                <a16:creationId xmlns:a16="http://schemas.microsoft.com/office/drawing/2014/main" id="{A05AD1D5-EC8B-4F82-C5A1-545B18C9A5B7}"/>
+              </a:ext>
+            </a:extLst>
+          </p:cNvPr>
+          <p:cNvPicPr>
+            <a:picLocks noChangeAspect="1"/>
+          </p:cNvPicPr>
+          <p:nvPr/>
+        </p:nvPicPr>
+        <p:blipFill>
+          <a:blip r:embed="rId2">
+            <a:extLst>
+              <a:ext uri="{28A0092B-C50C-407E-A947-70E740481C1C}">
+                <a14:useLocalDpi xmlns:a14="http://schemas.microsoft.com/office/drawing/2010/main" val="0"/>
+              </a:ext>
+            </a:extLst>
+          </a:blip>
+          <a:stretch>
+            <a:fillRect/>
+          </a:stretch>
+        </p:blipFill>
+        <p:spPr>
+          <a:xfrm>
+            <a:off x="7459948" y="3150429"/>
+            <a:ext cx="540000" cy="540000"/>
+          </a:xfrm>
+          <a:prstGeom prst="rect">
+            <a:avLst/>
+          </a:prstGeom>
+        </p:spPr>
+      </p:pic>
+      <p:pic>
+        <p:nvPicPr>
+          <p:cNvPr id="5" name="Picture 4">
+            <a:extLst>
+              <a:ext uri="{FF2B5EF4-FFF2-40B4-BE49-F238E27FC236}">
+                <a16:creationId xmlns:a16="http://schemas.microsoft.com/office/drawing/2014/main" id="{40DD7AC2-B3FE-83CA-F385-31EAD3B5020F}"/>
+              </a:ext>
+            </a:extLst>
+          </p:cNvPr>
+          <p:cNvPicPr>
+            <a:picLocks noChangeAspect="1"/>
+          </p:cNvPicPr>
+          <p:nvPr/>
+        </p:nvPicPr>
+        <p:blipFill>
+          <a:blip r:embed="rId3">
+            <a:extLst>
+              <a:ext uri="{28A0092B-C50C-407E-A947-70E740481C1C}">
+                <a14:useLocalDpi xmlns:a14="http://schemas.microsoft.com/office/drawing/2010/main" val="0"/>
+              </a:ext>
+            </a:extLst>
+          </a:blip>
+          <a:stretch>
+            <a:fillRect/>
+          </a:stretch>
+        </p:blipFill>
+        <p:spPr>
+          <a:xfrm>
+            <a:off x="7459948" y="4809180"/>
+            <a:ext cx="540000" cy="540000"/>
+          </a:xfrm>
+          <a:prstGeom prst="rect">
+            <a:avLst/>
+          </a:prstGeom>
+        </p:spPr>
+      </p:pic>
+      <p:pic>
+        <p:nvPicPr>
+          <p:cNvPr id="7" name="Picture 6">
+            <a:extLst>
+              <a:ext uri="{FF2B5EF4-FFF2-40B4-BE49-F238E27FC236}">
+                <a16:creationId xmlns:a16="http://schemas.microsoft.com/office/drawing/2014/main" id="{81D7D081-8947-06FE-0766-657C3FCE84CB}"/>
+              </a:ext>
+            </a:extLst>
+          </p:cNvPr>
+          <p:cNvPicPr>
+            <a:picLocks noChangeAspect="1"/>
+          </p:cNvPicPr>
+          <p:nvPr/>
+        </p:nvPicPr>
+        <p:blipFill>
+          <a:blip r:embed="rId4">
+            <a:extLst>
+              <a:ext uri="{28A0092B-C50C-407E-A947-70E740481C1C}">
+                <a14:useLocalDpi xmlns:a14="http://schemas.microsoft.com/office/drawing/2010/main" val="0"/>
+              </a:ext>
+            </a:extLst>
+          </a:blip>
+          <a:stretch>
+            <a:fillRect/>
+          </a:stretch>
+        </p:blipFill>
+        <p:spPr>
+          <a:xfrm>
+            <a:off x="7459948" y="4039050"/>
+            <a:ext cx="540000" cy="540000"/>
+          </a:xfrm>
+          <a:prstGeom prst="rect">
+            <a:avLst/>
+          </a:prstGeom>
+        </p:spPr>
+      </p:pic>
+    </p:spTree>
+    <p:extLst>
+      <p:ext uri="{BB962C8B-B14F-4D97-AF65-F5344CB8AC3E}">
+        <p14:creationId xmlns:p14="http://schemas.microsoft.com/office/powerpoint/2010/main" val="4137476865"/>
+      </p:ext>
+    </p:extLst>
+  </p:cSld>
+  <p:clrMapOvr>
+    <a:masterClrMapping/>
+  </p:clrMapOvr>
+</p:sld>
+</file>
+
+<file path=ppt/slides/slide3.xml><?xml version="1.0" encoding="utf-8"?>
+<p:sld xmlns:a="http://schemas.openxmlformats.org/drawingml/2006/main" xmlns:r="http://schemas.openxmlformats.org/officeDocument/2006/relationships" xmlns:p="http://schemas.openxmlformats.org/presentationml/2006/main">
+  <p:cSld>
+    <p:spTree>
+      <p:nvGrpSpPr>
+        <p:cNvPr id="1" name=""/>
+        <p:cNvGrpSpPr/>
+        <p:nvPr/>
+      </p:nvGrpSpPr>
+      <p:grpSpPr>
+        <a:xfrm>
+          <a:off x="0" y="0"/>
+          <a:ext cx="0" cy="0"/>
+          <a:chOff x="0" y="0"/>
+          <a:chExt cx="0" cy="0"/>
+        </a:xfrm>
+      </p:grpSpPr>
       <p:pic>
         <p:nvPicPr>
           <p:cNvPr id="3" name="Picture 2" descr="The image depicts a user interface showing an enabled access control system, a display calibration feature, and a license status.&#10;&#10;AI-generated content may be incorrect.">
@@ -3726,7 +4146,7 @@
 </p:sld>
 </file>
 
-<file path=ppt/slides/slide3.xml><?xml version="1.0" encoding="utf-8"?>
+<file path=ppt/slides/slide4.xml><?xml version="1.0" encoding="utf-8"?>
 <p:sld xmlns:a="http://schemas.openxmlformats.org/drawingml/2006/main" xmlns:r="http://schemas.openxmlformats.org/officeDocument/2006/relationships" xmlns:p="http://schemas.openxmlformats.org/presentationml/2006/main">
   <p:cSld>
     <p:spTree>
@@ -3920,7 +4340,7 @@
 </p:sld>
 </file>
 
-<file path=ppt/slides/slide4.xml><?xml version="1.0" encoding="utf-8"?>
+<file path=ppt/slides/slide5.xml><?xml version="1.0" encoding="utf-8"?>
 <p:sld xmlns:a="http://schemas.openxmlformats.org/drawingml/2006/main" xmlns:r="http://schemas.openxmlformats.org/officeDocument/2006/relationships" xmlns:p="http://schemas.openxmlformats.org/presentationml/2006/main">
   <p:cSld>
     <p:spTree>
@@ -5391,15 +5811,6 @@
 </file>
 
 <file path=customXml/item2.xml><?xml version="1.0" encoding="utf-8"?>
-<?mso-contentType ?>
-<FormTemplates xmlns="http://schemas.microsoft.com/sharepoint/v3/contenttype/forms">
-  <Display>DocumentLibraryForm</Display>
-  <Edit>DocumentLibraryForm</Edit>
-  <New>DocumentLibraryForm</New>
-</FormTemplates>
-</file>
-
-<file path=customXml/item3.xml><?xml version="1.0" encoding="utf-8"?>
 <p:properties xmlns:p="http://schemas.microsoft.com/office/2006/metadata/properties" xmlns:xsi="http://www.w3.org/2001/XMLSchema-instance" xmlns:pc="http://schemas.microsoft.com/office/infopath/2007/PartnerControls">
   <documentManagement>
     <TaxCatchAll xmlns="6dfb7b4b-871d-4c24-9d42-16b14ecd044c" xsi:nil="true"/>
@@ -5408,6 +5819,15 @@
     </lcf76f155ced4ddcb4097134ff3c332f>
   </documentManagement>
 </p:properties>
+</file>
+
+<file path=customXml/item3.xml><?xml version="1.0" encoding="utf-8"?>
+<?mso-contentType ?>
+<FormTemplates xmlns="http://schemas.microsoft.com/sharepoint/v3/contenttype/forms">
+  <Display>DocumentLibraryForm</Display>
+  <Edit>DocumentLibraryForm</Edit>
+  <New>DocumentLibraryForm</New>
+</FormTemplates>
 </file>
 
 <file path=customXml/itemProps1.xml><?xml version="1.0" encoding="utf-8"?>
@@ -5430,20 +5850,26 @@
 </file>
 
 <file path=customXml/itemProps2.xml><?xml version="1.0" encoding="utf-8"?>
+<ds:datastoreItem xmlns:ds="http://schemas.openxmlformats.org/officeDocument/2006/customXml" ds:itemID="{2EF670CE-B0AA-4D52-AFC6-AA4BF7D46EEA}">
+  <ds:schemaRefs>
+    <ds:schemaRef ds:uri="http://purl.org/dc/terms/"/>
+    <ds:schemaRef ds:uri="http://schemas.microsoft.com/office/2006/documentManagement/types"/>
+    <ds:schemaRef ds:uri="http://www.w3.org/XML/1998/namespace"/>
+    <ds:schemaRef ds:uri="http://purl.org/dc/elements/1.1/"/>
+    <ds:schemaRef ds:uri="http://schemas.openxmlformats.org/package/2006/metadata/core-properties"/>
+    <ds:schemaRef ds:uri="http://schemas.microsoft.com/office/2006/metadata/properties"/>
+    <ds:schemaRef ds:uri="http://schemas.microsoft.com/office/infopath/2007/PartnerControls"/>
+    <ds:schemaRef ds:uri="6dfb7b4b-871d-4c24-9d42-16b14ecd044c"/>
+    <ds:schemaRef ds:uri="51c7d8ad-74c8-4833-8478-0d0a5cafce0c"/>
+    <ds:schemaRef ds:uri="http://purl.org/dc/dcmitype/"/>
+  </ds:schemaRefs>
+</ds:datastoreItem>
+</file>
+
+<file path=customXml/itemProps3.xml><?xml version="1.0" encoding="utf-8"?>
 <ds:datastoreItem xmlns:ds="http://schemas.openxmlformats.org/officeDocument/2006/customXml" ds:itemID="{EF875D47-8106-485E-98E0-D60C6A98DA6A}">
   <ds:schemaRefs>
     <ds:schemaRef ds:uri="http://schemas.microsoft.com/sharepoint/v3/contenttype/forms"/>
   </ds:schemaRefs>
 </ds:datastoreItem>
-</file>
-
-<file path=customXml/itemProps3.xml><?xml version="1.0" encoding="utf-8"?>
-<ds:datastoreItem xmlns:ds="http://schemas.openxmlformats.org/officeDocument/2006/customXml" ds:itemID="{2EF670CE-B0AA-4D52-AFC6-AA4BF7D46EEA}">
-  <ds:schemaRefs>
-    <ds:schemaRef ds:uri="http://schemas.microsoft.com/office/2006/metadata/properties"/>
-    <ds:schemaRef ds:uri="http://schemas.microsoft.com/office/infopath/2007/PartnerControls"/>
-    <ds:schemaRef ds:uri="6dfb7b4b-871d-4c24-9d42-16b14ecd044c"/>
-    <ds:schemaRef ds:uri="51c7d8ad-74c8-4833-8478-0d0a5cafce0c"/>
-  </ds:schemaRefs>
-</ds:datastoreItem>
 </file>